--- a/Documentation/2024178027_First_Review.pptx
+++ b/Documentation/2024178027_First_Review.pptx
@@ -359,7 +359,7 @@
           <a:p>
             <a:fld id="{74F2789C-5F6B-4AA6-8508-763937A86712}" type="datetimeFigureOut">
               <a:rPr lang="en-IN" smtClean="0"/>
-              <a:t>05-04-2026</a:t>
+              <a:t>07-04-2026</a:t>
             </a:fld>
             <a:endParaRPr lang="en-IN"/>
           </a:p>
@@ -567,7 +567,7 @@
           <a:p>
             <a:fld id="{74F2789C-5F6B-4AA6-8508-763937A86712}" type="datetimeFigureOut">
               <a:rPr lang="en-IN" smtClean="0"/>
-              <a:t>05-04-2026</a:t>
+              <a:t>07-04-2026</a:t>
             </a:fld>
             <a:endParaRPr lang="en-IN"/>
           </a:p>
@@ -823,7 +823,7 @@
           <a:p>
             <a:fld id="{74F2789C-5F6B-4AA6-8508-763937A86712}" type="datetimeFigureOut">
               <a:rPr lang="en-IN" smtClean="0"/>
-              <a:t>05-04-2026</a:t>
+              <a:t>07-04-2026</a:t>
             </a:fld>
             <a:endParaRPr lang="en-IN"/>
           </a:p>
@@ -997,7 +997,7 @@
           <a:p>
             <a:fld id="{74F2789C-5F6B-4AA6-8508-763937A86712}" type="datetimeFigureOut">
               <a:rPr lang="en-IN" smtClean="0"/>
-              <a:t>05-04-2026</a:t>
+              <a:t>07-04-2026</a:t>
             </a:fld>
             <a:endParaRPr lang="en-IN"/>
           </a:p>
@@ -1340,7 +1340,7 @@
           <a:p>
             <a:fld id="{74F2789C-5F6B-4AA6-8508-763937A86712}" type="datetimeFigureOut">
               <a:rPr lang="en-IN" smtClean="0"/>
-              <a:t>05-04-2026</a:t>
+              <a:t>07-04-2026</a:t>
             </a:fld>
             <a:endParaRPr lang="en-IN"/>
           </a:p>
@@ -1615,7 +1615,7 @@
           <a:p>
             <a:fld id="{74F2789C-5F6B-4AA6-8508-763937A86712}" type="datetimeFigureOut">
               <a:rPr lang="en-IN" smtClean="0"/>
-              <a:t>05-04-2026</a:t>
+              <a:t>07-04-2026</a:t>
             </a:fld>
             <a:endParaRPr lang="en-IN"/>
           </a:p>
@@ -1994,7 +1994,7 @@
           <a:p>
             <a:fld id="{74F2789C-5F6B-4AA6-8508-763937A86712}" type="datetimeFigureOut">
               <a:rPr lang="en-IN" smtClean="0"/>
-              <a:t>05-04-2026</a:t>
+              <a:t>07-04-2026</a:t>
             </a:fld>
             <a:endParaRPr lang="en-IN"/>
           </a:p>
@@ -2112,7 +2112,7 @@
           <a:p>
             <a:fld id="{74F2789C-5F6B-4AA6-8508-763937A86712}" type="datetimeFigureOut">
               <a:rPr lang="en-IN" smtClean="0"/>
-              <a:t>05-04-2026</a:t>
+              <a:t>07-04-2026</a:t>
             </a:fld>
             <a:endParaRPr lang="en-IN"/>
           </a:p>
@@ -2283,7 +2283,7 @@
           <a:p>
             <a:fld id="{74F2789C-5F6B-4AA6-8508-763937A86712}" type="datetimeFigureOut">
               <a:rPr lang="en-IN" smtClean="0"/>
-              <a:t>05-04-2026</a:t>
+              <a:t>07-04-2026</a:t>
             </a:fld>
             <a:endParaRPr lang="en-IN"/>
           </a:p>
@@ -2637,7 +2637,7 @@
           <a:p>
             <a:fld id="{74F2789C-5F6B-4AA6-8508-763937A86712}" type="datetimeFigureOut">
               <a:rPr lang="en-IN" smtClean="0"/>
-              <a:t>05-04-2026</a:t>
+              <a:t>07-04-2026</a:t>
             </a:fld>
             <a:endParaRPr lang="en-IN"/>
           </a:p>
@@ -3019,7 +3019,7 @@
           <a:p>
             <a:fld id="{74F2789C-5F6B-4AA6-8508-763937A86712}" type="datetimeFigureOut">
               <a:rPr lang="en-IN" smtClean="0"/>
-              <a:t>05-04-2026</a:t>
+              <a:t>07-04-2026</a:t>
             </a:fld>
             <a:endParaRPr lang="en-IN"/>
           </a:p>
@@ -3306,7 +3306,7 @@
           <a:p>
             <a:fld id="{74F2789C-5F6B-4AA6-8508-763937A86712}" type="datetimeFigureOut">
               <a:rPr lang="en-IN" smtClean="0"/>
-              <a:t>05-04-2026</a:t>
+              <a:t>07-04-2026</a:t>
             </a:fld>
             <a:endParaRPr lang="en-IN"/>
           </a:p>
@@ -4734,10 +4734,10 @@
       </p:grpSpPr>
       <p:pic>
         <p:nvPicPr>
-          <p:cNvPr id="5" name="Picture 4">
+          <p:cNvPr id="3" name="Picture 2">
             <a:extLst>
               <a:ext uri="{FF2B5EF4-FFF2-40B4-BE49-F238E27FC236}">
-                <a16:creationId xmlns:a16="http://schemas.microsoft.com/office/drawing/2014/main" id="{29E4E3C2-6274-D836-F8E3-983009D5B8A0}"/>
+                <a16:creationId xmlns:a16="http://schemas.microsoft.com/office/drawing/2014/main" id="{3747A963-3009-74F9-0AF7-B6A89F1C942F}"/>
               </a:ext>
             </a:extLst>
           </p:cNvPr>
@@ -4747,15 +4747,21 @@
           <p:nvPr/>
         </p:nvPicPr>
         <p:blipFill>
-          <a:blip r:embed="rId2"/>
+          <a:blip r:embed="rId2">
+            <a:extLst>
+              <a:ext uri="{28A0092B-C50C-407E-A947-70E740481C1C}">
+                <a14:useLocalDpi xmlns:a14="http://schemas.microsoft.com/office/drawing/2010/main" val="0"/>
+              </a:ext>
+            </a:extLst>
+          </a:blip>
           <a:stretch>
             <a:fillRect/>
           </a:stretch>
         </p:blipFill>
         <p:spPr>
           <a:xfrm>
-            <a:off x="3266959" y="284480"/>
-            <a:ext cx="5861464" cy="5980740"/>
+            <a:off x="2369976" y="0"/>
+            <a:ext cx="7287208" cy="6553636"/>
           </a:xfrm>
           <a:prstGeom prst="rect">
             <a:avLst/>
